--- a/docs/PetPal Presentation.pptx
+++ b/docs/PetPal Presentation.pptx
@@ -7140,7 +7140,7 @@
             </a:pPr>
             <a:r>
               <a:rPr lang="en"/>
-              <a:t>- </a:t>
+              <a:t>- Leave reviews for pet care providers</a:t>
             </a:r>
             <a:endParaRPr/>
           </a:p>
